--- a/assets/powerpoints/module-n3-vetements/E1-je-me-lance.pptx
+++ b/assets/powerpoints/module-n3-vetements/E1-je-me-lance.pptx
@@ -6672,7 +6672,97 @@
                 </a:solidFill>
                 <a:latin typeface="Verdana"/>
               </a:rPr>
-              <a:t>Dans l'activité interactive : le &lt;b&gt;manteau d'hiver&lt;/b&gt; (premier hiver, taille inconnue), les &lt;b&gt;bottes en liquidation&lt;/b&gt; (une étiquette à deux prix), le &lt;b&gt;chandail en rabais&lt;/b&gt; (une affiche qui ne dit pas sur quoi). Vous choisissez d'être le &lt;b&gt;client&lt;/b&gt; ou la &lt;b&gt;conseillère&lt;/b&gt; — faites les deux, ils n'emploient pas les mêmes phrases.</a:t>
+              <a:t>Dans l'activité interactive : le </a:t>
+            </a:r>
+            <a:r>
+              <a:rPr sz="2000" b="1" i="0">
+                <a:solidFill>
+                  <a:srgbClr val="4B4F52"/>
+                </a:solidFill>
+                <a:latin typeface="Verdana"/>
+              </a:rPr>
+              <a:t>manteau d'hiver</a:t>
+            </a:r>
+            <a:r>
+              <a:rPr sz="2000" b="0" i="0">
+                <a:solidFill>
+                  <a:srgbClr val="4B4F52"/>
+                </a:solidFill>
+                <a:latin typeface="Verdana"/>
+              </a:rPr>
+              <a:t> (premier hiver, taille inconnue), les </a:t>
+            </a:r>
+            <a:r>
+              <a:rPr sz="2000" b="1" i="0">
+                <a:solidFill>
+                  <a:srgbClr val="4B4F52"/>
+                </a:solidFill>
+                <a:latin typeface="Verdana"/>
+              </a:rPr>
+              <a:t>bottes en liquidation</a:t>
+            </a:r>
+            <a:r>
+              <a:rPr sz="2000" b="0" i="0">
+                <a:solidFill>
+                  <a:srgbClr val="4B4F52"/>
+                </a:solidFill>
+                <a:latin typeface="Verdana"/>
+              </a:rPr>
+              <a:t> (une étiquette à deux prix), le </a:t>
+            </a:r>
+            <a:r>
+              <a:rPr sz="2000" b="1" i="0">
+                <a:solidFill>
+                  <a:srgbClr val="4B4F52"/>
+                </a:solidFill>
+                <a:latin typeface="Verdana"/>
+              </a:rPr>
+              <a:t>chandail en rabais</a:t>
+            </a:r>
+            <a:r>
+              <a:rPr sz="2000" b="0" i="0">
+                <a:solidFill>
+                  <a:srgbClr val="4B4F52"/>
+                </a:solidFill>
+                <a:latin typeface="Verdana"/>
+              </a:rPr>
+              <a:t> (une affiche qui ne dit pas sur quoi). Vous choisissez d'être le </a:t>
+            </a:r>
+            <a:r>
+              <a:rPr sz="2000" b="1" i="0">
+                <a:solidFill>
+                  <a:srgbClr val="4B4F52"/>
+                </a:solidFill>
+                <a:latin typeface="Verdana"/>
+              </a:rPr>
+              <a:t>client</a:t>
+            </a:r>
+            <a:r>
+              <a:rPr sz="2000" b="0" i="0">
+                <a:solidFill>
+                  <a:srgbClr val="4B4F52"/>
+                </a:solidFill>
+                <a:latin typeface="Verdana"/>
+              </a:rPr>
+              <a:t> ou la </a:t>
+            </a:r>
+            <a:r>
+              <a:rPr sz="2000" b="1" i="0">
+                <a:solidFill>
+                  <a:srgbClr val="4B4F52"/>
+                </a:solidFill>
+                <a:latin typeface="Verdana"/>
+              </a:rPr>
+              <a:t>conseillère</a:t>
+            </a:r>
+            <a:r>
+              <a:rPr sz="2000" b="0" i="0">
+                <a:solidFill>
+                  <a:srgbClr val="4B4F52"/>
+                </a:solidFill>
+                <a:latin typeface="Verdana"/>
+              </a:rPr>
+              <a:t> — faites les deux, ils n'emploient pas les mêmes phrases.</a:t>
             </a:r>
           </a:p>
         </p:txBody>

--- a/assets/powerpoints/module-n3-vetements/E1-je-me-lance.pptx
+++ b/assets/powerpoints/module-n3-vetements/E1-je-me-lance.pptx
@@ -10536,7 +10536,7 @@
                 </a:solidFill>
                 <a:latin typeface="Verdana"/>
               </a:rPr>
-              <a:t>Sept panneaux « En apprendre plus » dans l'activité, avec l'audio. Ils restent ouverts pendant la production.</a:t>
+              <a:t>Sept panneaux « Ouvrir la mini-leçon » dans l'activité, avec l'audio. Ils restent ouverts pendant la production.</a:t>
             </a:r>
           </a:p>
         </p:txBody>
